--- a/Data/CSC106_PF_W1.pptx
+++ b/Data/CSC106_PF_W1.pptx
@@ -18342,7 +18342,7 @@
             </a:pPr>
             <a:r>
               <a:rPr b="1"/>
-              <a:t>Due Wed. Sept. 23rd by the end of class.</a:t>
+              <a:t>Due Wed. Sept. 16th by the end of class.</a:t>
             </a:r>
           </a:p>
         </p:txBody>
